--- a/deck/Zomato_Gold_Retention_Strategy.pptx
+++ b/deck/Zomato_Gold_Retention_Strategy.pptx
@@ -15595,7 +15595,7 @@
                 <a:ea typeface="Arial" pitchFamily="34" charset="-122"/>
                 <a:cs typeface="Arial" pitchFamily="34" charset="-120"/>
               </a:rPr>
-              <a:t>Quick commerce, 1,000+ dark stores. A weekly habit.</a:t>
+              <a:t>Quick commerce, 2,000+ dark stores. A weekly habit.</a:t>
             </a:r>
             <a:endParaRPr lang="en-US" sz="950" dirty="0"/>
           </a:p>
